--- a/decks/triple-electromagnetism/triple-electromagnetism_ch2_electromagnets.pptx
+++ b/decks/triple-electromagnetism/triple-electromagnetism_ch2_electromagnets.pptx
@@ -125,29 +125,29 @@
   <p:extLst>
     <p:ext uri="{521415D9-36F7-43E2-AB2F-B90AF26B5E84}">
       <p14:sectionLst xmlns:p14="http://schemas.microsoft.com/office/powerpoint/2010/main">
-        <p14:section name="Opening" id="{376292cf-c305-2651-d33c-081cd5c35347}">
+        <p14:section name="Opening" id="{83d22d3c-6d73-cdb9-8f6b-fd0aa46b4f58}">
           <p14:sldIdLst>
             <p14:sldId id="256"/>
           </p14:sldIdLst>
         </p14:section>
-        <p14:section name="Gate" id="{75bc847b-dc85-cdc9-f204-11f89428a607}">
+        <p14:section name="Gate" id="{b53fc41e-8bf1-c0f1-4c91-a27924749a52}">
           <p14:sldIdLst>
             <p14:sldId id="257"/>
             <p14:sldId id="258"/>
           </p14:sldIdLst>
         </p14:section>
-        <p14:section name="Pre-teach" id="{2b3fe459-dbeb-f6e5-59a2-95bfd7b758d8}">
+        <p14:section name="Pre-teach" id="{36037a5f-6509-12f3-c8c8-b72941f4eaa7}">
           <p14:sldIdLst>
             <p14:sldId id="259"/>
           </p14:sldIdLst>
         </p14:section>
-        <p14:section name="Read-along" id="{956af552-3cdb-757c-951f-8d2caba971fa}">
+        <p14:section name="Read-along" id="{ae501431-b5ab-65ff-ac06-a0c3dc815124}">
           <p14:sldIdLst>
             <p14:sldId id="260"/>
             <p14:sldId id="261"/>
           </p14:sldIdLst>
         </p14:section>
-        <p14:section name="Teach" id="{1e5d8562-5023-fcee-03e3-dba1c751e995}">
+        <p14:section name="Teach" id="{c940dbaa-a95b-9229-d12a-394491ee7bde}">
           <p14:sldIdLst>
             <p14:sldId id="262"/>
             <p14:sldId id="263"/>
@@ -156,7 +156,7 @@
             <p14:sldId id="266"/>
           </p14:sldIdLst>
         </p14:section>
-        <p14:section name="Routes" id="{3ba87bb0-ecac-1719-ab24-ad59a1cfaa56}">
+        <p14:section name="Routes" id="{4bcc2a14-1856-9c3a-1d12-feabfb3ec10c}">
           <p14:sldIdLst>
             <p14:sldId id="267"/>
             <p14:sldId id="268"/>
@@ -164,12 +164,12 @@
             <p14:sldId id="270"/>
           </p14:sldIdLst>
         </p14:section>
-        <p14:section name="Close" id="{2c638aff-abb9-2afc-e593-5a9cf3573c20}">
+        <p14:section name="Close" id="{98227076-9c32-316e-2126-c75f46ba7e1c}">
           <p14:sldIdLst>
             <p14:sldId id="271"/>
           </p14:sldIdLst>
         </p14:section>
-        <p14:section name="Answers" id="{c0d064fd-5ea3-c271-0542-55f297f78f0f}">
+        <p14:section name="Answers" id="{c41096dd-e7bf-d652-4011-0b392d92430d}">
           <p14:sldIdLst>
             <p14:sldId id="272"/>
             <p14:sldId id="273"/>
@@ -1416,7 +1416,7 @@
             <a:r>
               <a:rPr lang="en-US" dirty="0"/>
               <a:t>Answers — task 2: Make it stronger. Reveal the answer; pupils mark their own work in a different colour, then read the "why" together. Same destination for every lane, so one answer serves the whole class.
-Answer: A   Wind more turns of wire on the coil
+Answer: C   Wind more turns of wire on the coil
 Why: The three ways to strengthen an electromagnet are an iron core, more turns and more current. With the supply fixed, winding more turns is the change that works; wood, card and distance all make it weaker or do nothing.
 Ask a Support pupil to explain one step, and a Stretch pupil to share their extension.</a:t>
             </a:r>
@@ -1600,7 +1600,7 @@
               <a:t>Do now — retrieval. Silent, no notes, no help: recall comes before any support. Give about four minutes.
 1. The current in a straight wire is reversed. What happens to the magnetic field around the wire?  →  A   It reverses direction
 2. A solenoid with an ___ core is called an electromagnet.  →  iron
-3. Which of these would NOT make an electromagnet stronger?  →  A   Using thicker card to wrap the coil on
+3. Which of these would NOT make an electromagnet stronger?  →  B   Using thicker card to wrap the coil on
 Circulate: who gets 3/3 (Stretch route), 2/3 (Core), 0–1 (Support)? Use this to route pupils later in the lesson.</a:t>
             </a:r>
             <a:endParaRPr lang="en-US" dirty="0"/>
@@ -1692,7 +1692,7 @@
               <a:t>Answers — pupils mark their own in a different colour, then hands up for 3/3, 2/3, 1/3.
 1. A   It reverses direction. The field direction depends on the current direction, so reversing the current reverses the field. Its strength does not change.
 2. iron. Iron is a magnetic material that becomes an induced magnet inside the coil, making the field much stronger.
-3. A   Using thicker card to wrap the coil on. Card is not magnetic, so it has no effect on the field. The three ways to make an electromagnet stronger are an iron core, more turns and more current.
+3. B   Using thicker card to wrap the coil on. Card is not magnetic, so it has no effect on the field. The three ways to make an electromagnet stronger are an iron core, more turns and more current.
 Say the route each score points to: 3/3 Stretch, 2/3 Core, 0–1 Support. Pupils may choose to move up.</a:t>
             </a:r>
             <a:endParaRPr lang="en-US" dirty="0"/>
@@ -7161,7 +7161,7 @@
                 <a:ea typeface="Calibri" pitchFamily="34" charset="-122"/>
                 <a:cs typeface="Calibri" pitchFamily="34" charset="-120"/>
               </a:rPr>
-              <a:t>Wind more turns of wire on the coil</a:t>
+              <a:t>Use thinner card between the coil and the plate</a:t>
             </a:r>
             <a:endParaRPr lang="en-US" sz="2600" dirty="0"/>
           </a:p>
@@ -7235,7 +7235,7 @@
                 <a:ea typeface="Calibri" pitchFamily="34" charset="-122"/>
                 <a:cs typeface="Calibri" pitchFamily="34" charset="-120"/>
               </a:rPr>
-              <a:t>Use thinner card between the coil and the plate</a:t>
+              <a:t>Wind more turns of wire on the coil</a:t>
             </a:r>
             <a:endParaRPr lang="en-US" sz="2600" dirty="0"/>
           </a:p>
@@ -8676,7 +8676,7 @@
                 <a:ea typeface="Calibri" pitchFamily="34" charset="-122"/>
                 <a:cs typeface="Calibri" pitchFamily="34" charset="-120"/>
               </a:rPr>
-              <a:t>It disappears</a:t>
+              <a:t>It stays exactly the same</a:t>
             </a:r>
             <a:endParaRPr lang="en-US" sz="2400" dirty="0"/>
           </a:p>
@@ -8750,7 +8750,7 @@
                 <a:ea typeface="Calibri" pitchFamily="34" charset="-122"/>
                 <a:cs typeface="Calibri" pitchFamily="34" charset="-120"/>
               </a:rPr>
-              <a:t>It stays exactly the same</a:t>
+              <a:t>It disappears</a:t>
             </a:r>
             <a:endParaRPr lang="en-US" sz="2400" dirty="0"/>
           </a:p>
@@ -9836,7 +9836,7 @@
                 <a:ea typeface="Cambria" pitchFamily="34" charset="-122"/>
                 <a:cs typeface="Cambria" pitchFamily="34" charset="-120"/>
               </a:rPr>
-              <a:t>A   Wind more turns of wire on the coil</a:t>
+              <a:t>C   Wind more turns of wire on the coil</a:t>
             </a:r>
             <a:endParaRPr lang="en-US" sz="1800" dirty="0"/>
           </a:p>
@@ -10866,7 +10866,7 @@
                 <a:ea typeface="Calibri" pitchFamily="34" charset="-122"/>
                 <a:cs typeface="Calibri" pitchFamily="34" charset="-120"/>
               </a:rPr>
-              <a:t>It disappears</a:t>
+              <a:t>It stays exactly the same</a:t>
             </a:r>
             <a:endParaRPr lang="en-US" sz="2000" dirty="0"/>
           </a:p>
@@ -10940,7 +10940,7 @@
                 <a:ea typeface="Calibri" pitchFamily="34" charset="-122"/>
                 <a:cs typeface="Calibri" pitchFamily="34" charset="-120"/>
               </a:rPr>
-              <a:t>It stays exactly the same</a:t>
+              <a:t>It disappears</a:t>
             </a:r>
             <a:endParaRPr lang="en-US" sz="2000" dirty="0"/>
           </a:p>
@@ -11342,7 +11342,7 @@
                 <a:ea typeface="Calibri" pitchFamily="34" charset="-122"/>
                 <a:cs typeface="Calibri" pitchFamily="34" charset="-120"/>
               </a:rPr>
-              <a:t>Using thicker card to wrap the coil on</a:t>
+              <a:t>Adding more turns to the coil</a:t>
             </a:r>
             <a:endParaRPr lang="en-US" sz="2200" dirty="0"/>
           </a:p>
@@ -11379,7 +11379,7 @@
                 <a:ea typeface="Calibri" pitchFamily="34" charset="-122"/>
                 <a:cs typeface="Calibri" pitchFamily="34" charset="-120"/>
               </a:rPr>
-              <a:t>Adding an iron core</a:t>
+              <a:t>Using thicker card to wrap the coil on</a:t>
             </a:r>
             <a:endParaRPr lang="en-US" sz="2200" dirty="0"/>
           </a:p>
@@ -11416,7 +11416,7 @@
                 <a:ea typeface="Calibri" pitchFamily="34" charset="-122"/>
                 <a:cs typeface="Calibri" pitchFamily="34" charset="-120"/>
               </a:rPr>
-              <a:t>Adding more turns to the coil</a:t>
+              <a:t>Adding an iron core</a:t>
             </a:r>
             <a:endParaRPr lang="en-US" sz="2200" dirty="0"/>
           </a:p>
@@ -12354,7 +12354,7 @@
                 <a:ea typeface="Calibri" pitchFamily="34" charset="-122"/>
                 <a:cs typeface="Calibri" pitchFamily="34" charset="-120"/>
               </a:rPr>
-              <a:t>A   Using thicker card to wrap the coil on</a:t>
+              <a:t>B   Using thicker card to wrap the coil on</a:t>
             </a:r>
             <a:endParaRPr lang="en-US" sz="2200" dirty="0"/>
           </a:p>

--- a/decks/triple-electromagnetism/triple-electromagnetism_ch2_electromagnets.pptx
+++ b/decks/triple-electromagnetism/triple-electromagnetism_ch2_electromagnets.pptx
@@ -125,29 +125,29 @@
   <p:extLst>
     <p:ext uri="{521415D9-36F7-43E2-AB2F-B90AF26B5E84}">
       <p14:sectionLst xmlns:p14="http://schemas.microsoft.com/office/powerpoint/2010/main">
-        <p14:section name="Opening" id="{83d22d3c-6d73-cdb9-8f6b-fd0aa46b4f58}">
+        <p14:section name="Opening" id="{4a9aef68-5a16-6244-f185-0d8685d67d98}">
           <p14:sldIdLst>
             <p14:sldId id="256"/>
           </p14:sldIdLst>
         </p14:section>
-        <p14:section name="Gate" id="{b53fc41e-8bf1-c0f1-4c91-a27924749a52}">
+        <p14:section name="Gate" id="{23f66f5b-3a71-d628-39e1-df1c94a116b4}">
           <p14:sldIdLst>
             <p14:sldId id="257"/>
             <p14:sldId id="258"/>
           </p14:sldIdLst>
         </p14:section>
-        <p14:section name="Pre-teach" id="{36037a5f-6509-12f3-c8c8-b72941f4eaa7}">
+        <p14:section name="Pre-teach" id="{7096df4f-ea34-0244-879e-34ec768fe78b}">
           <p14:sldIdLst>
             <p14:sldId id="259"/>
           </p14:sldIdLst>
         </p14:section>
-        <p14:section name="Read-along" id="{ae501431-b5ab-65ff-ac06-a0c3dc815124}">
+        <p14:section name="Read-along" id="{4b09ade5-d2c5-1e4f-5da3-8d345fd03705}">
           <p14:sldIdLst>
             <p14:sldId id="260"/>
             <p14:sldId id="261"/>
           </p14:sldIdLst>
         </p14:section>
-        <p14:section name="Teach" id="{c940dbaa-a95b-9229-d12a-394491ee7bde}">
+        <p14:section name="Teach" id="{de1f0c26-7973-2a71-3759-b57a34fbdb62}">
           <p14:sldIdLst>
             <p14:sldId id="262"/>
             <p14:sldId id="263"/>
@@ -156,7 +156,7 @@
             <p14:sldId id="266"/>
           </p14:sldIdLst>
         </p14:section>
-        <p14:section name="Routes" id="{4bcc2a14-1856-9c3a-1d12-feabfb3ec10c}">
+        <p14:section name="Routes" id="{f2efee88-a8fb-dcd6-9eb8-d1a1d978b2c0}">
           <p14:sldIdLst>
             <p14:sldId id="267"/>
             <p14:sldId id="268"/>
@@ -164,12 +164,12 @@
             <p14:sldId id="270"/>
           </p14:sldIdLst>
         </p14:section>
-        <p14:section name="Close" id="{98227076-9c32-316e-2126-c75f46ba7e1c}">
+        <p14:section name="Close" id="{a1dd3c44-27ae-bc69-4f3a-3e7a41bf0b04}">
           <p14:sldIdLst>
             <p14:sldId id="271"/>
           </p14:sldIdLst>
         </p14:section>
-        <p14:section name="Answers" id="{c41096dd-e7bf-d652-4011-0b392d92430d}">
+        <p14:section name="Answers" id="{54d6cec7-9553-2496-513e-a6e1161f0ed6}">
           <p14:sldIdLst>
             <p14:sldId id="272"/>
             <p14:sldId id="273"/>
